--- a/assets/pptx/catalog-576.pptx
+++ b/assets/pptx/catalog-576.pptx
@@ -3303,7 +3303,7 @@
                 <a:ea typeface="Ebrima"/>
                 <a:cs typeface="Ebrima"/>
               </a:rPr>
-              <a:t>እንደገና አሃአሃ (2x)</a:t>
+              <a:t>እንደገና አሃአሃ 2x</a:t>
             </a:r>
           </a:p>
         </p:txBody>
@@ -3388,7 +3388,7 @@
                 <a:ea typeface="Ebrima"/>
                 <a:cs typeface="Ebrima"/>
               </a:rPr>
-              <a:t>ይሄ ነው የማይባል ልዩ ጣዕም ሰጥተህ (2)</a:t>
+              <a:t>ይሄ ነው የማይባል ልዩ ጣዕም ሰጥተህ 2</a:t>
             </a:r>
           </a:p>
           <a:p>
@@ -3509,7 +3509,7 @@
                 <a:ea typeface="Ebrima"/>
                 <a:cs typeface="Ebrima"/>
               </a:rPr>
-              <a:t>ይሄ ነው የማይባል ልዩ ጣዕም ሰጥተህ (2x)</a:t>
+              <a:t>ይሄ ነው የማይባል ልዩ ጣዕም ሰጥተህ 2x</a:t>
             </a:r>
           </a:p>
           <a:p>
@@ -3545,7 +3545,7 @@
                 <a:ea typeface="Ebrima"/>
                 <a:cs typeface="Ebrima"/>
               </a:rPr>
-              <a:t>መኖር የሚያስወድድ ኢየሱስ ስላለኝ (2x)</a:t>
+              <a:t>መኖር የሚያስወድድ ኢየሱስ ስላለኝ 2x</a:t>
             </a:r>
           </a:p>
         </p:txBody>
@@ -3612,7 +3612,7 @@
                 <a:ea typeface="Ebrima"/>
                 <a:cs typeface="Ebrima"/>
               </a:rPr>
-              <a:t>እንደገና አመልክሃለሁ (3X)</a:t>
+              <a:t>እንደገና አመልክሃለሁ 3X</a:t>
             </a:r>
           </a:p>
           <a:p>
@@ -3630,7 +3630,7 @@
                 <a:ea typeface="Ebrima"/>
                 <a:cs typeface="Ebrima"/>
               </a:rPr>
-              <a:t>እንደገና አከብርሃለሁ (3X)</a:t>
+              <a:t>እንደገና አከብርሃለሁ 3X</a:t>
             </a:r>
           </a:p>
         </p:txBody>
@@ -3733,7 +3733,7 @@
                 <a:ea typeface="Ebrima"/>
                 <a:cs typeface="Ebrima"/>
               </a:rPr>
-              <a:t>ባርከኸኝ ባርከኸኝ (2x)</a:t>
+              <a:t>ባርከኸኝ ባርከኸኝ 2x</a:t>
             </a:r>
           </a:p>
           <a:p>
@@ -3769,7 +3769,7 @@
                 <a:ea typeface="Ebrima"/>
                 <a:cs typeface="Ebrima"/>
               </a:rPr>
-              <a:t>አንተ አልበቃህም ዎይ ሰጠኸኝ ሰጠኸኝ (2x)</a:t>
+              <a:t>አንተ አልበቃህም ዎይ ሰጠኸኝ ሰጠኸኝ 2x</a:t>
             </a:r>
           </a:p>
         </p:txBody>
@@ -3939,7 +3939,7 @@
                 <a:ea typeface="Ebrima"/>
                 <a:cs typeface="Ebrima"/>
               </a:rPr>
-              <a:t>አልጠብቅም ገና እስክሄድ ሠማይ ላይ (2x)</a:t>
+              <a:t>አልጠብቅም ገና እስክሄድ ሠማይ ላይ 2x</a:t>
             </a:r>
           </a:p>
           <a:p>
@@ -3975,7 +3975,7 @@
                 <a:ea typeface="Ebrima"/>
                 <a:cs typeface="Ebrima"/>
               </a:rPr>
-              <a:t>እኔ አልጠብቅም ገና እስክሄድ ሠማይ ላይ (2x)</a:t>
+              <a:t>እኔ አልጠብቅም ገና እስክሄድ ሠማይ ላይ 2x</a:t>
             </a:r>
           </a:p>
         </p:txBody>
